--- a/decks/geog-urban/geog-urban_ch5_uk-bristol.pptx
+++ b/decks/geog-urban/geog-urban_ch5_uk-bristol.pptx
@@ -126,30 +126,30 @@
   <p:extLst>
     <p:ext uri="{521415D9-36F7-43E2-AB2F-B90AF26B5E84}">
       <p14:sectionLst xmlns:p14="http://schemas.microsoft.com/office/powerpoint/2010/main">
-        <p14:section name="Opening" id="{11b5323c-dc29-725b-f8f9-2d4a0fe79bee}">
+        <p14:section name="Opening" id="{fb0c52b2-f41e-5de5-b5fd-cca38921231d}">
           <p14:sldIdLst>
             <p14:sldId id="256"/>
           </p14:sldIdLst>
         </p14:section>
-        <p14:section name="Gate" id="{957108a5-b0a9-06da-a470-acfe77c45643}">
+        <p14:section name="Gate" id="{5cdea80b-be80-eda8-063e-795c13ebb7fd}">
           <p14:sldIdLst>
             <p14:sldId id="257"/>
             <p14:sldId id="258"/>
           </p14:sldIdLst>
         </p14:section>
-        <p14:section name="Pre-teach" id="{92dd1d1b-ff42-9e2f-9f7e-d75892304097}">
+        <p14:section name="Pre-teach" id="{0030c421-40d1-1d70-57f9-ec3c5834bd25}">
           <p14:sldIdLst>
             <p14:sldId id="259"/>
             <p14:sldId id="260"/>
           </p14:sldIdLst>
         </p14:section>
-        <p14:section name="Read-along" id="{26513fd8-9345-23e9-ea73-941c0cfcef12}">
+        <p14:section name="Read-along" id="{0e1f0ac4-8be3-4452-17bf-c6ab0fb7cb2f}">
           <p14:sldIdLst>
             <p14:sldId id="261"/>
             <p14:sldId id="262"/>
           </p14:sldIdLst>
         </p14:section>
-        <p14:section name="Teach" id="{d219a899-6bcf-cc2f-cc32-9ebb729865a8}">
+        <p14:section name="Teach" id="{36335e6e-457e-dedb-52b8-a6ec4a51e21a}">
           <p14:sldIdLst>
             <p14:sldId id="263"/>
             <p14:sldId id="264"/>
@@ -158,7 +158,7 @@
             <p14:sldId id="267"/>
           </p14:sldIdLst>
         </p14:section>
-        <p14:section name="Routes" id="{126a4689-7a49-43a0-1ad2-2456bd67f406}">
+        <p14:section name="Routes" id="{c502d99e-a93e-0b57-b0f4-4ec8229c00c0}">
           <p14:sldIdLst>
             <p14:sldId id="268"/>
             <p14:sldId id="269"/>
@@ -166,12 +166,12 @@
             <p14:sldId id="271"/>
           </p14:sldIdLst>
         </p14:section>
-        <p14:section name="Close" id="{8a7d0000-7816-13e7-b69f-4e836c36b254}">
+        <p14:section name="Close" id="{b0389e1b-6275-fbf2-591e-e71c2c3a045c}">
           <p14:sldIdLst>
             <p14:sldId id="272"/>
           </p14:sldIdLst>
         </p14:section>
-        <p14:section name="Answers" id="{c8e791ac-faf0-199a-b5ae-0110d2a5e00a}">
+        <p14:section name="Answers" id="{13b71fbe-c963-8ba4-b6e1-879af9755273}">
           <p14:sldIdLst>
             <p14:sldId id="273"/>
             <p14:sldId id="274"/>
@@ -675,7 +675,7 @@
               <a:rPr lang="en-US" dirty="0"/>
               <a:t>Teach — Why the major cities grew where they did. Say it in your own words, then check understanding with a quick question: ask a pupil from the pre-teach group first, since they met these words and ideas before the lesson. Pupils try to recall before you re-explain.
 The twenty largest UK cities are mostly in England, with a cluster in the Midlands and the north. London is by far the biggest, with 7.2 million people in the city itself in the list the class used, followed by Birmingham with 992,000 and Leeds with 720,000; Bristol is tenth with 380,000. The population of a city depends on where you draw the line: the Greater London built-up area in the 2011 Census had 9,787,426 people, far more than the city figure. That is why two lists of UK cities can look so different.
-The distribution of the cities is largely due to the industrial revolution of the eighteenth century onwards. Industries grew where there were raw materials like coal and iron ore, and people moved to live near the work: Glasgow, Newcastle, Manchester, Leeds and Cardiff all grew this way. The capital cities, London, Belfast, Cardiff and Edinburgh, developed because of their political and administrative functions; London in particular is a global city and a financial centre. Birmingham grew because of its central position and the industrial inventions linked to it. Trade through the ports of London, Liverpool and Bristol made those cities grow too.
+The distribution of the cities is largely due to the industrial revolution of the eighteenth century onwards. Industries grew where there were raw materials like coal and iron ore, and people moved to live near the work: Glasgow, Newcastle, Manchester, Leeds and Cardiff all grew this way. London, Belfast, Cardiff and Edinburgh grew as capital cities, because government and administration are based in them; London in particular is a global city and a financial centre. Birmingham grew because of its central position and the industrial inventions linked to it. Trade through the ports of London, Liverpool and Bristol made those cities grow too.
 Tip: Four reasons for a city's growth: raw materials (coal and iron ore), capital functions, a central position, and a port. Give one named city for each.</a:t>
             </a:r>
             <a:endParaRPr lang="en-US" dirty="0"/>
@@ -767,7 +767,7 @@
               <a:t>Teach — Bristol: social and economic opportunities. Say it in your own words, then check understanding with a quick question: ask a pupil from the pre-teach group first, since they met these words and ideas before the lesson. Pupils try to recall before you re-explain.
 Bristol is the UK city you study. Urban change there has created social opportunities in culture, with a diverse cultural mix, and in leisure and recreation, both sport and shopping. New venues, teams and shopping areas give people more to do and more reasons to visit, which raises quality of life.
 The economic story starts with decline. Bristol was a traditional port town, importing tobacco from the West Indies and sherry from Bordeaux, and most jobs were in the primary and secondary sectors, building and loading ships. When the city-centre port was eventually closed to commercial use it left a huge void: unemployment and empty warehouses. Urban change has since filled that void with high-tech industries: silicon design businesses, Aardman Animations and aerospace. These industries have created jobs for a growing number of people.
-Why did high-tech firms choose Bristol? A government grant of £100 million to become a super-connected city with the fastest download speeds in the country. Two excellent local universities producing an educated, skilled workforce, with facilities that let companies carry out advanced research. A large mix of companies able to work together on research and development. Good transport links, and a clean, unpolluted environment. One big employer, the Defence Procurement Agency, set up on a greenfield site in Bristol in 1996 with over 10,000 employees, supplying the army, air force and navy with everything from boots to aircraft. More workers needed more homes, so a private housing development, the largest in Europe, was built for around 21,000 people, and the city sprawled outwards.
+Why did high-tech firms choose Bristol? A government grant of £100 million paid for super-fast broadband, giving the city the quickest download speeds in the country. Two excellent local universities producing an educated, skilled workforce, with facilities that let companies carry out advanced research. A large mix of companies able to work together on research and development. Good transport links, and a clean, unpolluted environment. One big employer, the Defence Procurement Agency, set up on a greenfield site in Bristol in 1996 with over 10,000 employees, supplying the army, air force and navy with everything from boots to aircraft. More workers needed more homes, so a private housing development, the largest in Europe, was built for around 21,000 people, and the city sprawled outwards.
 Tip: The Bristol economic story has a shape: port decline, then high-tech growth. Name all three high-tech industries and at least two reasons they came.</a:t>
             </a:r>
             <a:endParaRPr lang="en-US" dirty="0"/>
@@ -857,7 +857,7 @@
             <a:r>
               <a:rPr lang="en-US" dirty="0"/>
               <a:t>Teach — Bristol: environmental opportunities. Say it in your own words, then check understanding with a quick question: ask a pupil from the pre-teach group first, since they met these words and ideas before the lesson. Pupils try to recall before you re-explain.
-Urban change can improve the environment as well. Bristol made a plan to improve transport, energy efficiency and the use of renewable energy by 2020, along with other environmental initiatives. The lesson picked out three. First, improved energy efficiency and renewable energy development, so the city uses less energy and more of it comes from clean sources. Second, an integrated transport system, linking different forms of transport, such as buses, trains and cycle routes, so that people can leave the car at home. Third, urban greening: a policy that has led to a number of initiatives for improving the city's green spaces.
+Urban change can improve the environment as well. Bristol made a plan to improve transport, energy efficiency and the use of renewable energy by 2020, along with other environmental initiatives. The lesson picked out three. First, improved energy efficiency and renewable energy development, so the city uses less energy and more of it comes from clean sources. Second, an integrated transport system, linking different forms of transport, such as buses, trains and cycle routes, so that people can leave the car at home. Third, urban greening: a policy behind many schemes to improve the city's parks, trees and gardens.
 These three are the environmental opportunities you should name in a nine-mark answer about Bristol, alongside the social and economic ones. Together they let you argue that urban change has created social, economic and environmental opportunities, before you turn to the challenges in chapter 6.
 Tip: Three environmental opportunities in Bristol: energy efficiency and renewables, the integrated transport system, urban greening. Learn them as a trio.</a:t>
             </a:r>
@@ -2254,7 +2254,7 @@
             <a:r>
               <a:rPr lang="en-US" dirty="0"/>
               <a:t>Teach — Where do people live in the UK?. Say it in your own words, then check understanding with a quick question: ask a pupil from the pre-teach group first, since they met these words and ideas before the lesson. Pupils try to recall before you re-explain.
-The UK's population has increased rapidly, from 41 million in 1900 to 64 million in 2015. It is not distributed evenly. Distribution means the way something is spread over an area, and population density is the measurement that captures it: the number of people in an area, found by dividing the number of people by the area and given as people per square kilometre. Places with many people per square kilometre are densely populated; places with few are sparsely populated.
+The UK's population has grown quickly, from 41 million in 1900 to 64 million in 2015, but it is not spread evenly. Distribution means the way something is spread over an area, and population density is the measurement that captures it: the number of people in an area, found by dividing the number of people by the area and given as people per square kilometre. Places with many people per square kilometre are densely populated; places with few are sparsely populated.
 In the UK, 82% of people live in urban areas. London and the south-east are densely populated because of their pull factors: financial, business and cultural attractions, and jobs. Much of Scotland and Wales is sparsely populated; the lesson gives harsh climatic conditions as the reason, and the upland relief of these areas is part of the same story. The highest densities are found in the major cities, and as you move north through the UK population density generally falls, with a dense corridor between Edinburgh and Glasgow as the main exception.
 The distribution will keep changing. Job opportunities attract migrants from other parts of the world to settle in the larger cities, adding an average of 243,000 people a year between 2009 and 2014. At the same time, some people move the other way, from urban to rural areas, for retirement or because city life is too expensive; this is counter-urbanisation.
 Worked example — model it step by step, thinking aloud: A town has a population of 50,000 people and covers an area of 25 square kilometres. Calculate its population density. (1) Population density = number of people ÷ area. (2) 50,000 ÷ 25 = 2000. (3) Give the unit: people per square kilometre. (4) Check it is sensible: a town of 2000 people per km² is fairly dense, which fits a town. Answer: 2000 people per square kilometre.
@@ -2347,7 +2347,7 @@
             <a:r>
               <a:rPr lang="en-US" dirty="0"/>
               <a:t>Teach — Where do people live in the UK?. Say it in your own words, then check understanding with a quick question: ask a pupil from the pre-teach group first, since they met these words and ideas before the lesson. Pupils try to recall before you re-explain.
-The UK's population has increased rapidly, from 41 million in 1900 to 64 million in 2015. It is not distributed evenly. Distribution means the way something is spread over an area, and population density is the measurement that captures it: the number of people in an area, found by dividing the number of people by the area and given as people per square kilometre. Places with many people per square kilometre are densely populated; places with few are sparsely populated.
+The UK's population has grown quickly, from 41 million in 1900 to 64 million in 2015, but it is not spread evenly. Distribution means the way something is spread over an area, and population density is the measurement that captures it: the number of people in an area, found by dividing the number of people by the area and given as people per square kilometre. Places with many people per square kilometre are densely populated; places with few are sparsely populated.
 In the UK, 82% of people live in urban areas. London and the south-east are densely populated because of their pull factors: financial, business and cultural attractions, and jobs. Much of Scotland and Wales is sparsely populated; the lesson gives harsh climatic conditions as the reason, and the upland relief of these areas is part of the same story. The highest densities are found in the major cities, and as you move north through the UK population density generally falls, with a dense corridor between Edinburgh and Glasgow as the main exception.
 The distribution will keep changing. Job opportunities attract migrants from other parts of the world to settle in the larger cities, adding an average of 243,000 people a year between 2009 and 2014. At the same time, some people move the other way, from urban to rural areas, for retirement or because city life is too expensive; this is counter-urbanisation.
 Worked example — model it step by step, thinking aloud: A town has a population of 50,000 people and covers an area of 25 square kilometres. Calculate its population density. (1) Population density = number of people ÷ area. (2) 50,000 ÷ 25 = 2000. (3) Give the unit: people per square kilometre. (4) Check it is sensible: a town of 2000 people per km² is fairly dense, which fits a town. Answer: 2000 people per square kilometre.
@@ -5128,7 +5128,7 @@
                 <a:ea typeface="Calibri" pitchFamily="34" charset="-122"/>
                 <a:cs typeface="Calibri" pitchFamily="34" charset="-120"/>
               </a:rPr>
-              <a:t>Why did high-tech firms choose Bristol? A government grant of £100 million to become a super-connected city with the fastest download speeds in the country.</a:t>
+              <a:t>Why did high-tech firms choose Bristol? A government grant of £100 million paid for super-fast broadband, giving the city the quickest download speeds in the country.</a:t>
             </a:r>
             <a:endParaRPr lang="en-US" sz="2200" dirty="0"/>
           </a:p>
@@ -16598,7 +16598,7 @@
                 <a:ea typeface="Calibri" pitchFamily="34" charset="-122"/>
                 <a:cs typeface="Calibri" pitchFamily="34" charset="-120"/>
               </a:rPr>
-              <a:t>The UK's population has increased rapidly, from 41 million in 1900 to 64 million in 2015.</a:t>
+              <a:t>The UK's population has grown quickly, from 41 million in 1900 to 64 million in 2015, but it is not spread evenly.</a:t>
             </a:r>
             <a:endParaRPr lang="en-US" sz="1800" dirty="0"/>
           </a:p>
